--- a/docs/decks/web-modernize-onepager-v2.pptx
+++ b/docs/decks/web-modernize-onepager-v2.pptx
@@ -5220,7 +5220,7 @@
                 </a:solidFill>
                 <a:latin typeface="Calibri"/>
               </a:rPr>
-              <a:t>One workflow + a /verify gate (lint, types, tests, parity). Undo a unit with /rollback; redo with /retry.</a:t>
+              <a:t>One workflow + a /verify gate (lint · types · tests · parity · security). Undo with /rollback; redo with /retry.</a:t>
             </a:r>
           </a:p>
         </p:txBody>
@@ -5779,7 +5779,7 @@
                 </a:solidFill>
                 <a:latin typeface="Calibri"/>
               </a:rPr>
-              <a:t>Same Claude Code engine.  A structured, sprint-by-sprint migration workflow on top.        Balaji Harikrishnan · Cognizant · v0.11.0</a:t>
+              <a:t>Same Claude Code engine.  A structured, sprint-by-sprint migration workflow on top.        Balaji Harikrishnan · Cognizant · v0.13.0</a:t>
             </a:r>
           </a:p>
         </p:txBody>

--- a/docs/decks/web-modernize-onepager-v2.pptx
+++ b/docs/decks/web-modernize-onepager-v2.pptx
@@ -4621,7 +4621,7 @@
                 </a:solidFill>
                 <a:latin typeface="Consolas"/>
               </a:rPr>
-              <a:t>/auth</a:t>
+              <a:t>/foundation</a:t>
             </a:r>
           </a:p>
         </p:txBody>
@@ -5779,7 +5779,7 @@
                 </a:solidFill>
                 <a:latin typeface="Calibri"/>
               </a:rPr>
-              <a:t>Same Claude Code engine.  A structured, sprint-by-sprint migration workflow on top.        Balaji Harikrishnan · Cognizant · v0.13.0</a:t>
+              <a:t>Same Claude Code engine.  A structured, sprint-by-sprint migration workflow on top.        Balaji Harikrishnan · Cognizant · v0.15.0</a:t>
             </a:r>
           </a:p>
         </p:txBody>

--- a/docs/decks/web-modernize-onepager-v2.pptx
+++ b/docs/decks/web-modernize-onepager-v2.pptx
@@ -5779,7 +5779,7 @@
                 </a:solidFill>
                 <a:latin typeface="Calibri"/>
               </a:rPr>
-              <a:t>Same Claude Code engine.  A structured, sprint-by-sprint migration workflow on top.        Balaji Harikrishnan · Cognizant · v0.15.0</a:t>
+              <a:t>Same Claude Code engine.  A structured, sprint-by-sprint migration workflow on top.        Balaji Harikrishnan · Cognizant · v0.16.0</a:t>
             </a:r>
           </a:p>
         </p:txBody>

--- a/docs/decks/web-modernize-onepager-v2.pptx
+++ b/docs/decks/web-modernize-onepager-v2.pptx
@@ -5779,7 +5779,7 @@
                 </a:solidFill>
                 <a:latin typeface="Calibri"/>
               </a:rPr>
-              <a:t>Same Claude Code engine.  A structured, sprint-by-sprint migration workflow on top.        Balaji Harikrishnan · Cognizant · v0.16.0</a:t>
+              <a:t>Same Claude Code engine.  A structured, sprint-by-sprint migration workflow on top.        Balaji Harikrishnan · Cognizant · v0.18.0</a:t>
             </a:r>
           </a:p>
         </p:txBody>

--- a/docs/decks/web-modernize-onepager-v2.pptx
+++ b/docs/decks/web-modernize-onepager-v2.pptx
@@ -5779,7 +5779,7 @@
                 </a:solidFill>
                 <a:latin typeface="Calibri"/>
               </a:rPr>
-              <a:t>Same Claude Code engine.  A structured, sprint-by-sprint migration workflow on top.        Balaji Harikrishnan · Cognizant · v0.18.0</a:t>
+              <a:t>Same Claude Code engine.  A structured, sprint-by-sprint migration workflow on top.        Balaji Harikrishnan · Cognizant · v0.19.0</a:t>
             </a:r>
           </a:p>
         </p:txBody>
